--- a/weekly_report_template/out/التقرير_الأسبوعي_مثال_مختصر.pptx
+++ b/weekly_report_template/out/التقرير_الأسبوعي_مثال_مختصر.pptx
@@ -15,7 +15,7 @@
     <a:defPPr>
       <a:defRPr lang="ar-SA"/>
     </a:defPPr>
-    <a:lvl1pPr marL="0" algn="l" defTabSz="457200" rtl="0" eaLnBrk="1" latinLnBrk="0" hangingPunct="1">
+    <a:lvl1pPr marL="0" algn="r" defTabSz="457200" rtl="1" eaLnBrk="1" latinLnBrk="0" hangingPunct="1">
       <a:defRPr sz="1800" kern="1200" lang="ar-SA">
         <a:solidFill>
           <a:schemeClr val="tx1"/>
@@ -25,7 +25,7 @@
         <a:cs typeface="+mn-cs"/>
       </a:defRPr>
     </a:lvl1pPr>
-    <a:lvl2pPr marL="457200" algn="l" defTabSz="457200" rtl="0" eaLnBrk="1" latinLnBrk="0" hangingPunct="1">
+    <a:lvl2pPr marL="457200" algn="r" defTabSz="457200" rtl="1" eaLnBrk="1" latinLnBrk="0" hangingPunct="1">
       <a:defRPr sz="1800" kern="1200" lang="ar-SA">
         <a:solidFill>
           <a:schemeClr val="tx1"/>
@@ -35,7 +35,7 @@
         <a:cs typeface="+mn-cs"/>
       </a:defRPr>
     </a:lvl2pPr>
-    <a:lvl3pPr marL="914400" algn="l" defTabSz="457200" rtl="0" eaLnBrk="1" latinLnBrk="0" hangingPunct="1">
+    <a:lvl3pPr marL="914400" algn="r" defTabSz="457200" rtl="1" eaLnBrk="1" latinLnBrk="0" hangingPunct="1">
       <a:defRPr sz="1800" kern="1200" lang="ar-SA">
         <a:solidFill>
           <a:schemeClr val="tx1"/>
@@ -45,7 +45,7 @@
         <a:cs typeface="+mn-cs"/>
       </a:defRPr>
     </a:lvl3pPr>
-    <a:lvl4pPr marL="1371600" algn="l" defTabSz="457200" rtl="0" eaLnBrk="1" latinLnBrk="0" hangingPunct="1">
+    <a:lvl4pPr marL="1371600" algn="r" defTabSz="457200" rtl="1" eaLnBrk="1" latinLnBrk="0" hangingPunct="1">
       <a:defRPr sz="1800" kern="1200" lang="ar-SA">
         <a:solidFill>
           <a:schemeClr val="tx1"/>
@@ -55,7 +55,7 @@
         <a:cs typeface="+mn-cs"/>
       </a:defRPr>
     </a:lvl4pPr>
-    <a:lvl5pPr marL="1828800" algn="l" defTabSz="457200" rtl="0" eaLnBrk="1" latinLnBrk="0" hangingPunct="1">
+    <a:lvl5pPr marL="1828800" algn="r" defTabSz="457200" rtl="1" eaLnBrk="1" latinLnBrk="0" hangingPunct="1">
       <a:defRPr sz="1800" kern="1200" lang="ar-SA">
         <a:solidFill>
           <a:schemeClr val="tx1"/>
@@ -65,7 +65,7 @@
         <a:cs typeface="+mn-cs"/>
       </a:defRPr>
     </a:lvl5pPr>
-    <a:lvl6pPr marL="2286000" algn="l" defTabSz="457200" rtl="0" eaLnBrk="1" latinLnBrk="0" hangingPunct="1">
+    <a:lvl6pPr marL="2286000" algn="r" defTabSz="457200" rtl="1" eaLnBrk="1" latinLnBrk="0" hangingPunct="1">
       <a:defRPr sz="1800" kern="1200" lang="ar-SA">
         <a:solidFill>
           <a:schemeClr val="tx1"/>
@@ -75,7 +75,7 @@
         <a:cs typeface="+mn-cs"/>
       </a:defRPr>
     </a:lvl6pPr>
-    <a:lvl7pPr marL="2743200" algn="l" defTabSz="457200" rtl="0" eaLnBrk="1" latinLnBrk="0" hangingPunct="1">
+    <a:lvl7pPr marL="2743200" algn="r" defTabSz="457200" rtl="1" eaLnBrk="1" latinLnBrk="0" hangingPunct="1">
       <a:defRPr sz="1800" kern="1200" lang="ar-SA">
         <a:solidFill>
           <a:schemeClr val="tx1"/>
@@ -85,7 +85,7 @@
         <a:cs typeface="+mn-cs"/>
       </a:defRPr>
     </a:lvl7pPr>
-    <a:lvl8pPr marL="3200400" algn="l" defTabSz="457200" rtl="0" eaLnBrk="1" latinLnBrk="0" hangingPunct="1">
+    <a:lvl8pPr marL="3200400" algn="r" defTabSz="457200" rtl="1" eaLnBrk="1" latinLnBrk="0" hangingPunct="1">
       <a:defRPr sz="1800" kern="1200" lang="ar-SA">
         <a:solidFill>
           <a:schemeClr val="tx1"/>
@@ -95,7 +95,7 @@
         <a:cs typeface="+mn-cs"/>
       </a:defRPr>
     </a:lvl8pPr>
-    <a:lvl9pPr marL="3657600" algn="l" defTabSz="457200" rtl="0" eaLnBrk="1" latinLnBrk="0" hangingPunct="1">
+    <a:lvl9pPr marL="3657600" algn="r" defTabSz="457200" rtl="1" eaLnBrk="1" latinLnBrk="0" hangingPunct="1">
       <a:defRPr sz="1800" kern="1200" lang="ar-SA">
         <a:solidFill>
           <a:schemeClr val="tx1"/>
@@ -503,7 +503,9 @@
           <a:bodyPr/>
           <a:lstStyle/>
           <a:p>
-            <a:r>
+            <a:pPr algn="r" rtl="1"/>
+            <a:r>
+              <a:rPr lang="ar-SA"/>
               <a:t>دليل سريع: اكتب داخل الحقول الإرشادية (لا تُطبع إن بقيت فارغة). لأسبوع جديد: Ctrl+D على هذه الشريحة فيزيد العداد تلقائيًا. للتصدير: ملف ← تصدير ← PDF ← خيارات ← الشريحة الحالية. التفاصيل في الشريحة المخفية الأخيرة.</a:t>
             </a:r>
           </a:p>
@@ -573,7 +575,9 @@
           <a:bodyPr/>
           <a:lstStyle/>
           <a:p>
-            <a:r>
+            <a:pPr algn="r" rtl="1"/>
+            <a:r>
+              <a:rPr lang="ar-SA"/>
               <a:t>دليل سريع: اكتب داخل الحقول الإرشادية (لا تُطبع إن بقيت فارغة). لأسبوع جديد: Ctrl+D على هذه الشريحة فيزيد العداد تلقائيًا. للتصدير: ملف ← تصدير ← PDF ← خيارات ← الشريحة الحالية. التفاصيل في الشريحة المخفية الأخيرة.</a:t>
             </a:r>
           </a:p>
@@ -655,7 +659,7 @@
         <p:spPr>
           <a:xfrm>
             <a:off x="0" y="0"/>
-            <a:ext cx="7560000" cy="1656000"/>
+            <a:ext cx="7560000" cy="1584000"/>
           </a:xfrm>
           <a:prstGeom prst="rect">
             <a:avLst/>
@@ -684,16 +688,16 @@
         </p:nvCxnSpPr>
         <p:spPr>
           <a:xfrm flipV="1">
-            <a:off x="1638000" y="396000"/>
+            <a:off x="1422000" y="396000"/>
             <a:ext cx="198000" cy="234000"/>
           </a:xfrm>
           <a:prstGeom prst="line">
             <a:avLst/>
           </a:prstGeom>
-          <a:ln w="6350" cap="rnd">
+          <a:ln w="12700" cap="rnd">
             <a:solidFill>
               <a:srgbClr val="66CCFF">
-                <a:alpha val="30000"/>
+                <a:alpha val="45000"/>
               </a:srgbClr>
             </a:solidFill>
             <a:round/>
@@ -708,16 +712,16 @@
         </p:nvCxnSpPr>
         <p:spPr>
           <a:xfrm>
-            <a:off x="1836000" y="396000"/>
+            <a:off x="1620000" y="396000"/>
             <a:ext cx="216000" cy="126000"/>
           </a:xfrm>
           <a:prstGeom prst="line">
             <a:avLst/>
           </a:prstGeom>
-          <a:ln w="6350" cap="rnd">
+          <a:ln w="12700" cap="rnd">
             <a:solidFill>
               <a:srgbClr val="66CCFF">
-                <a:alpha val="30000"/>
+                <a:alpha val="45000"/>
               </a:srgbClr>
             </a:solidFill>
             <a:round/>
@@ -732,16 +736,16 @@
         </p:nvCxnSpPr>
         <p:spPr>
           <a:xfrm flipV="1">
-            <a:off x="2052000" y="234000"/>
+            <a:off x="1836000" y="234000"/>
             <a:ext cx="198000" cy="288000"/>
           </a:xfrm>
           <a:prstGeom prst="line">
             <a:avLst/>
           </a:prstGeom>
-          <a:ln w="6350" cap="rnd">
+          <a:ln w="12700" cap="rnd">
             <a:solidFill>
               <a:srgbClr val="66CCFF">
-                <a:alpha val="30000"/>
+                <a:alpha val="45000"/>
               </a:srgbClr>
             </a:solidFill>
             <a:round/>
@@ -756,16 +760,16 @@
         </p:nvCxnSpPr>
         <p:spPr>
           <a:xfrm>
-            <a:off x="2250000" y="234000"/>
+            <a:off x="2034000" y="234000"/>
             <a:ext cx="216000" cy="126000"/>
           </a:xfrm>
           <a:prstGeom prst="line">
             <a:avLst/>
           </a:prstGeom>
-          <a:ln w="6350" cap="rnd">
+          <a:ln w="12700" cap="rnd">
             <a:solidFill>
               <a:srgbClr val="66CCFF">
-                <a:alpha val="30000"/>
+                <a:alpha val="45000"/>
               </a:srgbClr>
             </a:solidFill>
             <a:round/>
@@ -780,16 +784,16 @@
         </p:nvCxnSpPr>
         <p:spPr>
           <a:xfrm flipV="1">
-            <a:off x="2466000" y="90000"/>
-            <a:ext cx="198000" cy="270000"/>
+            <a:off x="2250000" y="108000"/>
+            <a:ext cx="198000" cy="252000"/>
           </a:xfrm>
           <a:prstGeom prst="line">
             <a:avLst/>
           </a:prstGeom>
-          <a:ln w="6350" cap="rnd">
+          <a:ln w="12700" cap="rnd">
             <a:solidFill>
               <a:srgbClr val="66CCFF">
-                <a:alpha val="30000"/>
+                <a:alpha val="45000"/>
               </a:srgbClr>
             </a:solidFill>
             <a:round/>
@@ -804,16 +808,16 @@
         </p:nvCxnSpPr>
         <p:spPr>
           <a:xfrm>
-            <a:off x="2664000" y="90000"/>
-            <a:ext cx="198000" cy="162000"/>
+            <a:off x="2448000" y="108000"/>
+            <a:ext cx="198000" cy="144000"/>
           </a:xfrm>
           <a:prstGeom prst="line">
             <a:avLst/>
           </a:prstGeom>
-          <a:ln w="6350" cap="rnd">
+          <a:ln w="12700" cap="rnd">
             <a:solidFill>
               <a:srgbClr val="66CCFF">
-                <a:alpha val="30000"/>
+                <a:alpha val="45000"/>
               </a:srgbClr>
             </a:solidFill>
             <a:round/>
@@ -828,16 +832,16 @@
         </p:nvCxnSpPr>
         <p:spPr>
           <a:xfrm flipV="1">
-            <a:off x="2862000" y="28800"/>
-            <a:ext cx="180000" cy="223200"/>
+            <a:off x="2646000" y="93600"/>
+            <a:ext cx="180000" cy="158400"/>
           </a:xfrm>
           <a:prstGeom prst="line">
             <a:avLst/>
           </a:prstGeom>
-          <a:ln w="6350" cap="rnd">
+          <a:ln w="12700" cap="rnd">
             <a:solidFill>
               <a:srgbClr val="66CCFF">
-                <a:alpha val="30000"/>
+                <a:alpha val="45000"/>
               </a:srgbClr>
             </a:solidFill>
             <a:round/>
@@ -852,16 +856,16 @@
         </p:nvCxnSpPr>
         <p:spPr>
           <a:xfrm>
-            <a:off x="2052000" y="522000"/>
+            <a:off x="1836000" y="522000"/>
             <a:ext cx="126000" cy="252000"/>
           </a:xfrm>
           <a:prstGeom prst="line">
             <a:avLst/>
           </a:prstGeom>
-          <a:ln w="6350" cap="rnd">
+          <a:ln w="12700" cap="rnd">
             <a:solidFill>
               <a:srgbClr val="66CCFF">
-                <a:alpha val="30000"/>
+                <a:alpha val="45000"/>
               </a:srgbClr>
             </a:solidFill>
             <a:round/>
@@ -876,16 +880,16 @@
         </p:nvCxnSpPr>
         <p:spPr>
           <a:xfrm>
-            <a:off x="2466000" y="360000"/>
+            <a:off x="2250000" y="360000"/>
             <a:ext cx="108000" cy="234000"/>
           </a:xfrm>
           <a:prstGeom prst="line">
             <a:avLst/>
           </a:prstGeom>
-          <a:ln w="6350" cap="rnd">
+          <a:ln w="12700" cap="rnd">
             <a:solidFill>
               <a:srgbClr val="66CCFF">
-                <a:alpha val="30000"/>
+                <a:alpha val="45000"/>
               </a:srgbClr>
             </a:solidFill>
             <a:round/>
@@ -900,7 +904,7 @@
         </p:nvSpPr>
         <p:spPr>
           <a:xfrm>
-            <a:off x="1580400" y="572400"/>
+            <a:off x="1364400" y="572400"/>
             <a:ext cx="115200" cy="115200"/>
           </a:xfrm>
           <a:prstGeom prst="ellipse">
@@ -924,7 +928,7 @@
         </p:nvSpPr>
         <p:spPr>
           <a:xfrm>
-            <a:off x="1800000" y="360000"/>
+            <a:off x="1584000" y="360000"/>
             <a:ext cx="72000" cy="72000"/>
           </a:xfrm>
           <a:prstGeom prst="ellipse">
@@ -948,7 +952,7 @@
         </p:nvSpPr>
         <p:spPr>
           <a:xfrm>
-            <a:off x="2016000" y="486000"/>
+            <a:off x="1800000" y="486000"/>
             <a:ext cx="72000" cy="72000"/>
           </a:xfrm>
           <a:prstGeom prst="ellipse">
@@ -972,7 +976,7 @@
         </p:nvSpPr>
         <p:spPr>
           <a:xfrm>
-            <a:off x="2192400" y="176400"/>
+            <a:off x="1976400" y="176400"/>
             <a:ext cx="115200" cy="115200"/>
           </a:xfrm>
           <a:prstGeom prst="ellipse">
@@ -996,7 +1000,7 @@
         </p:nvSpPr>
         <p:spPr>
           <a:xfrm>
-            <a:off x="2430000" y="324000"/>
+            <a:off x="2214000" y="324000"/>
             <a:ext cx="72000" cy="72000"/>
           </a:xfrm>
           <a:prstGeom prst="ellipse">
@@ -1020,7 +1024,7 @@
         </p:nvSpPr>
         <p:spPr>
           <a:xfrm>
-            <a:off x="2628000" y="54000"/>
+            <a:off x="2412000" y="72000"/>
             <a:ext cx="72000" cy="72000"/>
           </a:xfrm>
           <a:prstGeom prst="ellipse">
@@ -1044,7 +1048,7 @@
         </p:nvSpPr>
         <p:spPr>
           <a:xfrm>
-            <a:off x="2804400" y="194400"/>
+            <a:off x="2588400" y="194400"/>
             <a:ext cx="115200" cy="115200"/>
           </a:xfrm>
           <a:prstGeom prst="ellipse">
@@ -1068,7 +1072,7 @@
         </p:nvSpPr>
         <p:spPr>
           <a:xfrm>
-            <a:off x="3006000" y="-7200"/>
+            <a:off x="2790000" y="57600"/>
             <a:ext cx="72000" cy="72000"/>
           </a:xfrm>
           <a:prstGeom prst="ellipse">
@@ -1092,7 +1096,7 @@
         </p:nvSpPr>
         <p:spPr>
           <a:xfrm>
-            <a:off x="2142000" y="738000"/>
+            <a:off x="1926000" y="738000"/>
             <a:ext cx="72000" cy="72000"/>
           </a:xfrm>
           <a:prstGeom prst="ellipse">
@@ -1116,7 +1120,7 @@
         </p:nvSpPr>
         <p:spPr>
           <a:xfrm>
-            <a:off x="2516400" y="536400"/>
+            <a:off x="2300400" y="536400"/>
             <a:ext cx="115200" cy="115200"/>
           </a:xfrm>
           <a:prstGeom prst="ellipse">
@@ -1140,8 +1144,8 @@
         </p:nvSpPr>
         <p:spPr>
           <a:xfrm>
-            <a:off x="432000" y="216000"/>
-            <a:ext cx="1080000" cy="504000"/>
+            <a:off x="432000" y="180000"/>
+            <a:ext cx="1080000" cy="540000"/>
           </a:xfrm>
           <a:prstGeom prst="roundRect">
             <a:avLst>
@@ -1228,8 +1232,8 @@
         </p:nvSpPr>
         <p:spPr>
           <a:xfrm>
-            <a:off x="6624000" y="180000"/>
-            <a:ext cx="504000" cy="504000"/>
+            <a:off x="6588000" y="180000"/>
+            <a:ext cx="540000" cy="540000"/>
           </a:xfrm>
           <a:prstGeom prst="rect">
             <a:avLst/>
@@ -1445,7 +1449,7 @@
         </p:nvSpPr>
         <p:spPr>
           <a:xfrm>
-            <a:off x="4824000" y="1152000"/>
+            <a:off x="4824000" y="1116000"/>
             <a:ext cx="2304000" cy="162000"/>
           </a:xfrm>
           <a:prstGeom prst="rect">
@@ -1847,7 +1851,7 @@
         </p:nvSpPr>
         <p:spPr>
           <a:xfrm>
-            <a:off x="2628000" y="1152000"/>
+            <a:off x="2628000" y="1116000"/>
             <a:ext cx="2052000" cy="162000"/>
           </a:xfrm>
           <a:prstGeom prst="rect">
@@ -2024,7 +2028,7 @@
         </p:nvSpPr>
         <p:spPr>
           <a:xfrm>
-            <a:off x="432000" y="1152000"/>
+            <a:off x="432000" y="1116000"/>
             <a:ext cx="2052000" cy="162000"/>
           </a:xfrm>
           <a:prstGeom prst="rect">
@@ -2201,7 +2205,7 @@
         </p:nvSpPr>
         <p:spPr>
           <a:xfrm>
-            <a:off x="2520000" y="1872000"/>
+            <a:off x="2520000" y="1800000"/>
             <a:ext cx="4608000" cy="180000"/>
           </a:xfrm>
           <a:prstGeom prst="rect">
@@ -2253,8 +2257,8 @@
         </p:nvSpPr>
         <p:spPr>
           <a:xfrm>
-            <a:off x="2520000" y="2070000"/>
-            <a:ext cx="4608000" cy="954000"/>
+            <a:off x="2520000" y="1998000"/>
+            <a:ext cx="4608000" cy="864000"/>
           </a:xfrm>
           <a:prstGeom prst="rect">
             <a:avLst/>
@@ -2378,8 +2382,8 @@
         </p:nvSpPr>
         <p:spPr>
           <a:xfrm>
-            <a:off x="1440000" y="1872000"/>
-            <a:ext cx="864000" cy="1152000"/>
+            <a:off x="1440000" y="1800000"/>
+            <a:ext cx="864000" cy="1008000"/>
           </a:xfrm>
           <a:prstGeom prst="roundRect">
             <a:avLst>
@@ -2408,8 +2412,8 @@
         </p:nvSpPr>
         <p:spPr>
           <a:xfrm>
-            <a:off x="1440000" y="1944000"/>
-            <a:ext cx="864000" cy="684000"/>
+            <a:off x="1440000" y="1836000"/>
+            <a:ext cx="864000" cy="576000"/>
           </a:xfrm>
           <a:prstGeom prst="rect">
             <a:avLst/>
@@ -2533,7 +2537,7 @@
         </p:nvSpPr>
         <p:spPr>
           <a:xfrm>
-            <a:off x="1404000" y="2646000"/>
+            <a:off x="1404000" y="2466000"/>
             <a:ext cx="936000" cy="324000"/>
           </a:xfrm>
           <a:prstGeom prst="rect">
@@ -2581,8 +2585,8 @@
         </p:nvSpPr>
         <p:spPr>
           <a:xfrm>
-            <a:off x="432000" y="1872000"/>
-            <a:ext cx="864000" cy="1152000"/>
+            <a:off x="432000" y="1800000"/>
+            <a:ext cx="864000" cy="1008000"/>
           </a:xfrm>
           <a:prstGeom prst="roundRect">
             <a:avLst>
@@ -2611,8 +2615,8 @@
         </p:nvSpPr>
         <p:spPr>
           <a:xfrm>
-            <a:off x="432000" y="1944000"/>
-            <a:ext cx="864000" cy="684000"/>
+            <a:off x="432000" y="1836000"/>
+            <a:ext cx="864000" cy="576000"/>
           </a:xfrm>
           <a:prstGeom prst="rect">
             <a:avLst/>
@@ -2736,7 +2740,7 @@
         </p:nvSpPr>
         <p:spPr>
           <a:xfrm>
-            <a:off x="396000" y="2646000"/>
+            <a:off x="396000" y="2466000"/>
             <a:ext cx="936000" cy="324000"/>
           </a:xfrm>
           <a:prstGeom prst="rect">
@@ -2784,7 +2788,7 @@
         </p:nvSpPr>
         <p:spPr>
           <a:xfrm>
-            <a:off x="6984000" y="3369600"/>
+            <a:off x="6984000" y="3153600"/>
             <a:ext cx="144000" cy="144000"/>
           </a:xfrm>
           <a:prstGeom prst="ellipse">
@@ -2806,7 +2810,7 @@
         </p:nvSpPr>
         <p:spPr>
           <a:xfrm>
-            <a:off x="7029000" y="3414600"/>
+            <a:off x="7029000" y="3198600"/>
             <a:ext cx="54000" cy="54000"/>
           </a:xfrm>
           <a:prstGeom prst="ellipse">
@@ -2828,7 +2832,7 @@
         </p:nvSpPr>
         <p:spPr>
           <a:xfrm>
-            <a:off x="2214000" y="3297600"/>
+            <a:off x="2214000" y="3081600"/>
             <a:ext cx="4680000" cy="288000"/>
           </a:xfrm>
           <a:prstGeom prst="rect">
@@ -2880,8 +2884,8 @@
         </p:nvSpPr>
         <p:spPr>
           <a:xfrm>
-            <a:off x="432000" y="3582000"/>
-            <a:ext cx="6696000" cy="1872000"/>
+            <a:off x="432000" y="3366000"/>
+            <a:ext cx="6696000" cy="2052000"/>
           </a:xfrm>
           <a:prstGeom prst="rect">
             <a:avLst/>
@@ -2901,7 +2905,7 @@
                 <a:spcPts val="0"/>
               </a:spcBef>
               <a:spcAft>
-                <a:spcPts val="200"/>
+                <a:spcPts val="100"/>
               </a:spcAft>
               <a:buClr>
                 <a:srgbClr val="127A5B"/>
@@ -2925,7 +2929,7 @@
                 <a:spcPts val="0"/>
               </a:spcBef>
               <a:spcAft>
-                <a:spcPts val="200"/>
+                <a:spcPts val="100"/>
               </a:spcAft>
               <a:buClr>
                 <a:srgbClr val="5F6B7A"/>
@@ -2949,7 +2953,7 @@
                 <a:spcPts val="0"/>
               </a:spcBef>
               <a:spcAft>
-                <a:spcPts val="200"/>
+                <a:spcPts val="100"/>
               </a:spcAft>
               <a:buClr>
                 <a:srgbClr val="5F6B7A"/>
@@ -2973,7 +2977,7 @@
                 <a:spcPts val="0"/>
               </a:spcBef>
               <a:spcAft>
-                <a:spcPts val="200"/>
+                <a:spcPts val="100"/>
               </a:spcAft>
               <a:buClr>
                 <a:srgbClr val="5F6B7A"/>
@@ -2997,7 +3001,7 @@
                 <a:spcPts val="0"/>
               </a:spcBef>
               <a:spcAft>
-                <a:spcPts val="200"/>
+                <a:spcPts val="100"/>
               </a:spcAft>
               <a:buClr>
                 <a:srgbClr val="5F6B7A"/>
@@ -3017,7 +3021,7 @@
           <a:p>
             <a:r>
               <a:rPr lang="ar-SA" dirty="0"/>
-              <a:t>مهمة في كل سطر: اسم المهمة — النتيجة أو الأثر (برقم إن أمكن). خمسة بنود كحد أقصى.</a:t>
+              <a:t>مهمة في كل سطر: اسم المهمة — النتيجة أو الأثر (برقم إن أمكن). ثمانية بنود كحد أقصى.</a:t>
             </a:r>
           </a:p>
         </p:txBody>
@@ -3030,7 +3034,7 @@
         </p:nvSpPr>
         <p:spPr>
           <a:xfrm>
-            <a:off x="6984000" y="5745600"/>
+            <a:off x="6984000" y="5673600"/>
             <a:ext cx="144000" cy="144000"/>
           </a:xfrm>
           <a:prstGeom prst="ellipse">
@@ -3052,7 +3056,7 @@
         </p:nvSpPr>
         <p:spPr>
           <a:xfrm>
-            <a:off x="7029000" y="5790600"/>
+            <a:off x="7029000" y="5718600"/>
             <a:ext cx="54000" cy="54000"/>
           </a:xfrm>
           <a:prstGeom prst="ellipse">
@@ -3074,7 +3078,7 @@
         </p:nvSpPr>
         <p:spPr>
           <a:xfrm>
-            <a:off x="2214000" y="5673600"/>
+            <a:off x="2214000" y="5601600"/>
             <a:ext cx="4680000" cy="288000"/>
           </a:xfrm>
           <a:prstGeom prst="rect">
@@ -3122,8 +3126,8 @@
         </p:nvSpPr>
         <p:spPr>
           <a:xfrm>
-            <a:off x="432000" y="8532000"/>
-            <a:ext cx="6696000" cy="1080000"/>
+            <a:off x="432000" y="8388000"/>
+            <a:ext cx="6696000" cy="1152000"/>
           </a:xfrm>
           <a:prstGeom prst="roundRect">
             <a:avLst>
@@ -3148,7 +3152,7 @@
         </p:nvSpPr>
         <p:spPr>
           <a:xfrm>
-            <a:off x="576000" y="8604000"/>
+            <a:off x="576000" y="8460000"/>
             <a:ext cx="6408000" cy="234000"/>
           </a:xfrm>
           <a:prstGeom prst="rect">
@@ -3200,8 +3204,8 @@
         </p:nvSpPr>
         <p:spPr>
           <a:xfrm>
-            <a:off x="576000" y="8874000"/>
-            <a:ext cx="6408000" cy="666000"/>
+            <a:off x="576000" y="8730000"/>
+            <a:ext cx="6408000" cy="738000"/>
           </a:xfrm>
           <a:prstGeom prst="rect">
             <a:avLst/>
@@ -3312,7 +3316,7 @@
           <a:p>
             <a:r>
               <a:rPr lang="ar-SA" dirty="0"/>
-              <a:t>جملة واحدة: السبب ← الأثر ← الموعد الجديد ← هل يحتاج تدخّلك؟ (اتركه فارغًا إن لم يوجد)</a:t>
+              <a:t>جملة واحدة: السبب ← الأثر ← الموعد الجديد ← هل يحتاج تدخّل المدير؟ (إن لم يوجد، اكتب: لا توجد تحديات)</a:t>
             </a:r>
           </a:p>
         </p:txBody>
@@ -3880,7 +3884,7 @@
             <a:pPr algn="r" rtl="1"/>
             <a:r>
               <a:rPr lang="ar-SA" dirty="0"/>
-              <a:t>الإدارة العامة للتحول الرقمي — إدارة البيانات والتحليلات</a:t>
+              <a:t>الإدارة العامة للتحول الرقمي — إدارة البيانات</a:t>
             </a:r>
           </a:p>
         </p:txBody>
@@ -4005,7 +4009,7 @@
             <a:pPr algn="r" rtl="1"/>
             <a:r>
               <a:rPr lang="ar-SA" dirty="0"/>
-              <a:t>أُطلقت لوحة مؤشرات الأداء واعتمدتها 3 إدارات، وأُنجزت 4 مهام. مهمتان ضمن الجدول، ومهمة (تكامل الموارد البشرية) متأخرة أسبوعًا بسبب تأخر استلام البيانات، والموعد الجديد 9 نوفمبر.</a:t>
+              <a:t>أُطلقت لوحة مؤشرات الأداء واعتمدتها 3 إدارات، وأُنجزت 4 مهام. مهمتان على المسار ومهمة (تكامل الموارد البشرية) متأخرة أسبوعًا بسبب تأخر استلام البيانات؛ الموعد المعدّل 12 نوفمبر.</a:t>
             </a:r>
           </a:p>
         </p:txBody>
@@ -4182,7 +4186,7 @@
             <a:pPr algn="r" rtl="1"/>
             <a:r>
               <a:rPr lang="ar-SA" dirty="0"/>
-              <a:t>تأخر استلام بيانات الموارد البشرية (تغيّر مسؤول النظام لديهم) — الأثر: تأخر مهمة التكامل أسبوعًا؛ الموعد الجديد للتسليم 9 نوفمبر؛ لا يحتاج تدخّلًا.</a:t>
+              <a:t>تأخر استلام بيانات الموارد البشرية بسبب تغيّر مسؤول النظام لديهم — الأثر: تأخر مهمة التكامل أسبوعًا (الموعد المعدّل 12 نوفمبر بدل 4 نوفمبر)؛ تصل البيانات 9 نوفمبر؛ لا يحتاج تدخّلًا.</a:t>
             </a:r>
           </a:p>
         </p:txBody>
@@ -4196,7 +4200,7 @@
           <p:nvPr/>
         </p:nvGraphicFramePr>
         <p:xfrm>
-          <a:off x="432000" y="5958000"/>
+          <a:off x="432000" y="5886000"/>
           <a:ext cx="6696000" cy="1242000"/>
         </p:xfrm>
         <a:graphic>
@@ -4777,7 +4781,7 @@
                           <a:latin typeface="IBM Plex Sans Arabic Medium"/>
                           <a:cs typeface="IBM Plex Sans Arabic Medium"/>
                         </a:rPr>
-                        <a:t>متأخر أسبوعًا</a:t>
+                        <a:t>متأخر</a:t>
                       </a:r>
                     </a:p>
                   </a:txBody>
@@ -4923,7 +4927,7 @@
                           <a:latin typeface="IBM Plex Sans Arabic Medium"/>
                           <a:cs typeface="IBM Plex Sans Arabic Medium"/>
                         </a:rPr>
-                        <a:t>20 نوفمبر 2026</a:t>
+                        <a:t>19 نوفمبر 2026</a:t>
                       </a:r>
                     </a:p>
                   </a:txBody>
@@ -5056,7 +5060,7 @@
             <a:pPr algn="r" rtl="1"/>
             <a:r>
               <a:rPr lang="ar-SA" dirty="0"/>
-              <a:t>الإدارة العامة للتحول الرقمي — إدارة البيانات والتحليلات</a:t>
+              <a:t>الإدارة العامة للتحول الرقمي — إدارة البيانات</a:t>
             </a:r>
           </a:p>
         </p:txBody>
@@ -5181,7 +5185,7 @@
             <a:pPr algn="r" rtl="1"/>
             <a:r>
               <a:rPr lang="ar-SA" dirty="0"/>
-              <a:t>اكتملت أتمتة تقارير الالتزام قبل موعدها واعتُمدت حقول تكامل الموارد البشرية رسميًا؛ 3 مهام منجزة، وتسير المهام الثلاث الجارية ضمن الجدول دون تحديات.</a:t>
+              <a:t>اكتملت أتمتة تقارير الالتزام قبل موعدها واعتُمدت حقول تكامل الموارد البشرية رسميًا؛ 4 مهام منجزة، والمهام الثلاث الجارية على المسار دون تحديات.</a:t>
             </a:r>
           </a:p>
         </p:txBody>
@@ -5206,7 +5210,7 @@
             <a:pPr algn="ctr" rtl="1"/>
             <a:r>
               <a:rPr lang="ar-SA" dirty="0"/>
-              <a:t>3</a:t>
+              <a:t>4</a:t>
             </a:r>
           </a:p>
         </p:txBody>
@@ -5291,7 +5295,7 @@
             </a:r>
             <a:r>
               <a:rPr lang="ar-SA" dirty="0"/>
-              <a:t> — اعتُمد 14 حقلًا بمحضر رسمي، وعاد التكامل إلى جدوله.</a:t>
+              <a:t> — اعتُمد 14 حقلًا بمحضر رسمي؛ التكامل على المسار للموعد المعدّل 12 نوفمبر.</a:t>
             </a:r>
           </a:p>
           <a:p>
@@ -5313,6 +5317,27 @@
             <a:r>
               <a:rPr lang="ar-SA" dirty="0"/>
               <a:t> — أُغلقت 6 من 6 طلبات خلال المدة المستهدفة.</a:t>
+            </a:r>
+          </a:p>
+          <a:p>
+            <a:pPr marL="162000" indent="-162000" algn="r" rtl="1">
+              <a:buClr>
+                <a:srgbClr val="127A5B"/>
+              </a:buClr>
+              <a:buSzPct val="110000"/>
+              <a:buFont typeface="Arial" pitchFamily="34" charset="0"/>
+              <a:buChar char="•"/>
+            </a:pPr>
+            <a:r>
+              <a:rPr lang="ar-SA" b="1" dirty="0">
+                <a:latin typeface="IBM Plex Sans Arabic"/>
+                <a:cs typeface="IBM Plex Sans Arabic"/>
+              </a:rPr>
+              <a:t>تسليم المسودة الأولى لدليل التصنيف</a:t>
+            </a:r>
+            <a:r>
+              <a:rPr lang="ar-SA" dirty="0"/>
+              <a:t> — سُلّمت الخميس 5 نوفمبر وبدأت مراجعتها.</a:t>
             </a:r>
           </a:p>
         </p:txBody>
@@ -5351,7 +5376,7 @@
           <p:nvPr/>
         </p:nvGraphicFramePr>
         <p:xfrm>
-          <a:off x="432000" y="5958000"/>
+          <a:off x="432000" y="5886000"/>
           <a:ext cx="6696000" cy="1242000"/>
         </p:xfrm>
         <a:graphic>
@@ -5884,7 +5909,7 @@
                           <a:latin typeface="IBM Plex Sans Arabic Medium"/>
                           <a:cs typeface="IBM Plex Sans Arabic Medium"/>
                         </a:rPr>
-                        <a:t>20 نوفمبر 2026</a:t>
+                        <a:t>19 نوفمبر 2026</a:t>
                       </a:r>
                     </a:p>
                   </a:txBody>
@@ -5982,7 +6007,7 @@
                           <a:latin typeface="IBM Plex Sans Arabic Medium"/>
                           <a:cs typeface="IBM Plex Sans Arabic Medium"/>
                         </a:rPr>
-                        <a:t>إعداد عرض نتائج الربع للإدارة العليا</a:t>
+                        <a:t>إعداد عرض نتائج الربع للإدارة العليا (جديد)</a:t>
                       </a:r>
                     </a:p>
                   </a:txBody>
@@ -7232,7 +7257,7 @@
                 <a:latin typeface="IBM Plex Sans Arabic"/>
                 <a:cs typeface="IBM Plex Sans Arabic"/>
               </a:rPr>
-              <a:t>ابدأ كل مهمة بالنتيجة لا بالنشاط («نُشرت اللوحة واعتمدتها 3 إدارات» بدل «عملت على اللوحة»). سبعة بنود كحد أقصى في المنجز وستة صفوف في الجدول. الأعداد في الخلاصة تطابق البطاقات وحالات الجدول. التحديات: السبب ← الأثر ← الموعد الجديد ← هل يحتاج تدخّلك؟ واكتب «لا توجد تحديات» إن لم توجد.</a:t>
+              <a:t>ابدأ كل مهمة بالنتيجة لا بالنشاط («نُشرت اللوحة واعتمدتها 3 إدارات» بدل «عملت على اللوحة»). ثمانية بنود كحد أقصى في المنجز وستة صفوف في الجدول. الأعداد في الخلاصة تطابق البطاقات وحالات الجدول. التحديات: السبب ← الأثر ← الموعد الجديد ← هل يحتاج تدخّل المدير؟ واكتب «لا توجد تحديات» إن لم توجد.</a:t>
             </a:r>
           </a:p>
         </p:txBody>
